--- a/classes/parte-12-osint-e-ingenieria-social/255-automatizacion-de-osint-spiderfoot-y-maltego/clase-255-presentacion.pptx
+++ b/classes/parte-12-osint-e-ingenieria-social/255-automatizacion-de-osint-spiderfoot-y-maltego/clase-255-presentacion.pptx
@@ -18,6 +18,10 @@
     <p:sldId id="266" r:id="rId17"/>
     <p:sldId id="267" r:id="rId18"/>
     <p:sldId id="268" r:id="rId19"/>
+    <p:sldId id="269" r:id="rId20"/>
+    <p:sldId id="270" r:id="rId21"/>
+    <p:sldId id="271" r:id="rId22"/>
+    <p:sldId id="272" r:id="rId23"/>
   </p:sldIdLst>
   <p:sldSz cx="9144000" cy="6858000" type="screen4x3"/>
   <p:notesSz cx="6858000" cy="9144000"/>
@@ -3199,7 +3203,7 @@
                   <a:srgbClr val="0B3D2E"/>
                 </a:solidFill>
               </a:rPr>
-              <a:t>📝 Reto verificable</a:t>
+              <a:t>🧰 Herramientas y preparación</a:t>
             </a:r>
           </a:p>
         </p:txBody>
@@ -3237,67 +3241,67 @@
                   <a:srgbClr val="22282E"/>
                 </a:solidFill>
               </a:rPr>
-              <a:t>•  Entrega un informe OSINT automatizado de un objetivo autorizado que incluya: configuración del</a:t>
-            </a:r>
-          </a:p>
-          <a:p>
-            <a:pPr>
-              <a:spcAft>
-                <a:spcPts val="600"/>
-              </a:spcAft>
-            </a:pPr>
-            <a:r>
-              <a:rPr sz="1500">
-                <a:solidFill>
-                  <a:srgbClr val="22282E"/>
-                </a:solidFill>
-              </a:rPr>
-              <a:t>•  scan (modo y módulos), grafo de relaciones exportado y una tabla de hallazgos verificados</a:t>
-            </a:r>
-          </a:p>
-          <a:p>
-            <a:pPr>
-              <a:spcAft>
-                <a:spcPts val="600"/>
-              </a:spcAft>
-            </a:pPr>
-            <a:r>
-              <a:rPr sz="1500">
-                <a:solidFill>
-                  <a:srgbClr val="22282E"/>
-                </a:solidFill>
-              </a:rPr>
-              <a:t>•  manualmente con nivel de confianza.</a:t>
-            </a:r>
-          </a:p>
-          <a:p>
-            <a:pPr>
-              <a:spcAft>
-                <a:spcPts val="600"/>
-              </a:spcAft>
-            </a:pPr>
-            <a:r>
-              <a:rPr sz="1500">
-                <a:solidFill>
-                  <a:srgbClr val="22282E"/>
-                </a:solidFill>
-              </a:rPr>
-              <a:t>•  Criterio de aceptación: el informe demuestra que el escaneo respetó el alcance (pasivo si así se</a:t>
-            </a:r>
-          </a:p>
-          <a:p>
-            <a:pPr>
-              <a:spcAft>
-                <a:spcPts val="600"/>
-              </a:spcAft>
-            </a:pPr>
-            <a:r>
-              <a:rPr sz="1500">
-                <a:solidFill>
-                  <a:srgbClr val="22282E"/>
-                </a:solidFill>
-              </a:rPr>
-              <a:t>•  definió) y cada hallazgo relevante fue verificado fuera de la herramienta.</a:t>
+              <a:t>•  SpiderFoot: pip install spiderfoot o vía Docker; arranca la UI con python3 sf.py -l 127.0.0.1:5001.</a:t>
+            </a:r>
+          </a:p>
+          <a:p>
+            <a:pPr>
+              <a:spcAft>
+                <a:spcPts val="600"/>
+              </a:spcAft>
+            </a:pPr>
+            <a:r>
+              <a:rPr sz="1500">
+                <a:solidFill>
+                  <a:srgbClr val="22282E"/>
+                </a:solidFill>
+              </a:rPr>
+              <a:t>•  API keys: registra claves gratuitas (Shodan, HIBP, VirusTotal, etc.) en Settings para enriquecer.</a:t>
+            </a:r>
+          </a:p>
+          <a:p>
+            <a:pPr>
+              <a:spcAft>
+                <a:spcPts val="600"/>
+              </a:spcAft>
+            </a:pPr>
+            <a:r>
+              <a:rPr sz="1500">
+                <a:solidFill>
+                  <a:srgbClr val="22282E"/>
+                </a:solidFill>
+              </a:rPr>
+              <a:t>•  Maltego: edición Community (CE) gratuita; registra una cuenta y añade transform hubs.</a:t>
+            </a:r>
+          </a:p>
+          <a:p>
+            <a:pPr>
+              <a:spcAft>
+                <a:spcPts val="600"/>
+              </a:spcAft>
+            </a:pPr>
+            <a:r>
+              <a:rPr sz="1500">
+                <a:solidFill>
+                  <a:srgbClr val="22282E"/>
+                </a:solidFill>
+              </a:rPr>
+              <a:t>•  Entorno aislado y sock puppets ya listos; documenta el alcance antes de escanear.</a:t>
+            </a:r>
+          </a:p>
+          <a:p>
+            <a:pPr>
+              <a:spcAft>
+                <a:spcPts val="600"/>
+              </a:spcAft>
+            </a:pPr>
+            <a:r>
+              <a:rPr sz="1500">
+                <a:solidFill>
+                  <a:srgbClr val="22282E"/>
+                </a:solidFill>
+              </a:rPr>
+              <a:t>•  Recordatorio: define el objetivo autorizado y desactiva módulos activos si el alcance es solo pasivo.</a:t>
             </a:r>
           </a:p>
         </p:txBody>
@@ -3348,7 +3352,7 @@
                   <a:srgbClr val="0B3D2E"/>
                 </a:solidFill>
               </a:rPr>
-              <a:t>⚠️ Errores comunes</a:t>
+              <a:t>🧪 Laboratorio guiado</a:t>
             </a:r>
           </a:p>
         </p:txBody>
@@ -3386,67 +3390,97 @@
                   <a:srgbClr val="22282E"/>
                 </a:solidFill>
               </a:rPr>
-              <a:t>•  Escaneo genera mucho tráfico al objetivo — Se activaron módulos activos. Cambia a modo pasivo o limita módulos.</a:t>
-            </a:r>
-          </a:p>
-          <a:p>
-            <a:pPr>
-              <a:spcAft>
-                <a:spcPts val="600"/>
-              </a:spcAft>
-            </a:pPr>
-            <a:r>
-              <a:rPr sz="1500">
-                <a:solidFill>
-                  <a:srgbClr val="22282E"/>
-                </a:solidFill>
-              </a:rPr>
-              <a:t>•  Pocos resultados — Faltan API keys. Configúralas en Settings.</a:t>
-            </a:r>
-          </a:p>
-          <a:p>
-            <a:pPr>
-              <a:spcAft>
-                <a:spcPts val="600"/>
-              </a:spcAft>
-            </a:pPr>
-            <a:r>
-              <a:rPr sz="1500">
-                <a:solidFill>
-                  <a:srgbClr val="22282E"/>
-                </a:solidFill>
-              </a:rPr>
-              <a:t>•  Grafo Maltego saturado e ilegible — Demasiadas entidades. Filtra, agrupa y usa layouts.</a:t>
-            </a:r>
-          </a:p>
-          <a:p>
-            <a:pPr>
-              <a:spcAft>
-                <a:spcPts val="600"/>
-              </a:spcAft>
-            </a:pPr>
-            <a:r>
-              <a:rPr sz="1500">
-                <a:solidFill>
-                  <a:srgbClr val="22282E"/>
-                </a:solidFill>
-              </a:rPr>
-              <a:t>•  Transforms fallan — Cuota agotada o transform hub no instalado. Revisa límites y reintenta.</a:t>
-            </a:r>
-          </a:p>
-          <a:p>
-            <a:pPr>
-              <a:spcAft>
-                <a:spcPts val="600"/>
-              </a:spcAft>
-            </a:pPr>
-            <a:r>
-              <a:rPr sz="1500">
-                <a:solidFill>
-                  <a:srgbClr val="22282E"/>
-                </a:solidFill>
-              </a:rPr>
-              <a:t>•  Resultados contradictorios — Fuentes desactualizadas. Verifica manualmente antes de concluir.</a:t>
+              <a:t>•  Objetivo: un dominio propio o example.com.</a:t>
+            </a:r>
+          </a:p>
+          <a:p>
+            <a:pPr>
+              <a:spcAft>
+                <a:spcPts val="600"/>
+              </a:spcAft>
+            </a:pPr>
+            <a:r>
+              <a:rPr sz="1500">
+                <a:solidFill>
+                  <a:srgbClr val="22282E"/>
+                </a:solidFill>
+              </a:rPr>
+              <a:t>•  Arranca SpiderFoot y crea un scan nuevo con el dominio como objetivo.</a:t>
+            </a:r>
+          </a:p>
+          <a:p>
+            <a:pPr>
+              <a:spcAft>
+                <a:spcPts val="600"/>
+              </a:spcAft>
+            </a:pPr>
+            <a:r>
+              <a:rPr sz="1500">
+                <a:solidFill>
+                  <a:srgbClr val="22282E"/>
+                </a:solidFill>
+              </a:rPr>
+              <a:t>•  Selecciona el modo "Passive" para no tocar al objetivo; revisa qué módulos se activan.</a:t>
+            </a:r>
+          </a:p>
+          <a:p>
+            <a:pPr>
+              <a:spcAft>
+                <a:spcPts val="600"/>
+              </a:spcAft>
+            </a:pPr>
+            <a:r>
+              <a:rPr sz="1500">
+                <a:solidFill>
+                  <a:srgbClr val="22282E"/>
+                </a:solidFill>
+              </a:rPr>
+              <a:t>•  Añade una API key (p. ej. Shodan) en Settings y repite un scan para comparar la cobertura.</a:t>
+            </a:r>
+          </a:p>
+          <a:p>
+            <a:pPr>
+              <a:spcAft>
+                <a:spcPts val="600"/>
+              </a:spcAft>
+            </a:pPr>
+            <a:r>
+              <a:rPr sz="1500">
+                <a:solidFill>
+                  <a:srgbClr val="22282E"/>
+                </a:solidFill>
+              </a:rPr>
+              <a:t>•  Explora los resultados por tipo de dato (correos, subdominios, IPs) y abre la vista de correlaciones.</a:t>
+            </a:r>
+          </a:p>
+          <a:p>
+            <a:pPr>
+              <a:spcAft>
+                <a:spcPts val="600"/>
+              </a:spcAft>
+            </a:pPr>
+            <a:r>
+              <a:rPr sz="1500">
+                <a:solidFill>
+                  <a:srgbClr val="22282E"/>
+                </a:solidFill>
+              </a:rPr>
+              <a:t>•  Exporta los hallazgos a CSV/GEXF para análisis externo.</a:t>
+            </a:r>
+          </a:p>
+          <a:p>
+            <a:pPr>
+              <a:spcAft>
+                <a:spcPts val="600"/>
+              </a:spcAft>
+            </a:pPr>
+            <a:r>
+              <a:rPr sz="1500">
+                <a:solidFill>
+                  <a:srgbClr val="22282E"/>
+                </a:solidFill>
+              </a:rPr>
+              <a:t>•  En Maltego CE, crea un grafo, arrastra una entidad Domain con tu dominio.</a:t>
             </a:r>
           </a:p>
         </p:txBody>
@@ -3497,7 +3531,7 @@
                   <a:srgbClr val="0B3D2E"/>
                 </a:solidFill>
               </a:rPr>
-              <a:t>❓ Preguntas frecuentes</a:t>
+              <a:t>✍️ Ejercicios</a:t>
             </a:r>
           </a:p>
         </p:txBody>
@@ -3535,97 +3569,82 @@
                   <a:srgbClr val="22282E"/>
                 </a:solidFill>
               </a:rPr>
-              <a:t>•  ❓ ¿SpiderFoot es siempre pasivo?</a:t>
-            </a:r>
-          </a:p>
-          <a:p>
-            <a:pPr>
-              <a:spcAft>
-                <a:spcPts val="600"/>
-              </a:spcAft>
-            </a:pPr>
-            <a:r>
-              <a:rPr sz="1500">
-                <a:solidFill>
-                  <a:srgbClr val="22282E"/>
-                </a:solidFill>
-              </a:rPr>
-              <a:t>•  No. Tiene módulos activos que consultan al objetivo (DNS, HTTP). Usa el modo pasivo si tu alcance lo</a:t>
-            </a:r>
-          </a:p>
-          <a:p>
-            <a:pPr>
-              <a:spcAft>
-                <a:spcPts val="600"/>
-              </a:spcAft>
-            </a:pPr>
-            <a:r>
-              <a:rPr sz="1500">
-                <a:solidFill>
-                  <a:srgbClr val="22282E"/>
-                </a:solidFill>
-              </a:rPr>
-              <a:t>•  exige.</a:t>
-            </a:r>
-          </a:p>
-          <a:p>
-            <a:pPr>
-              <a:spcAft>
-                <a:spcPts val="600"/>
-              </a:spcAft>
-            </a:pPr>
-            <a:r>
-              <a:rPr sz="1500">
-                <a:solidFill>
-                  <a:srgbClr val="22282E"/>
-                </a:solidFill>
-              </a:rPr>
-              <a:t>•  ❓ ¿Maltego CE sirve profesionalmente?</a:t>
-            </a:r>
-          </a:p>
-          <a:p>
-            <a:pPr>
-              <a:spcAft>
-                <a:spcPts val="600"/>
-              </a:spcAft>
-            </a:pPr>
-            <a:r>
-              <a:rPr sz="1500">
-                <a:solidFill>
-                  <a:srgbClr val="22282E"/>
-                </a:solidFill>
-              </a:rPr>
-              <a:t>•  Para aprender y grafos pequeños sí. Tiene límites de entidades por transform; la edición comercial</a:t>
-            </a:r>
-          </a:p>
-          <a:p>
-            <a:pPr>
-              <a:spcAft>
-                <a:spcPts val="600"/>
-              </a:spcAft>
-            </a:pPr>
-            <a:r>
-              <a:rPr sz="1500">
-                <a:solidFill>
-                  <a:srgbClr val="22282E"/>
-                </a:solidFill>
-              </a:rPr>
-              <a:t>•  levanta esos límites.</a:t>
-            </a:r>
-          </a:p>
-          <a:p>
-            <a:pPr>
-              <a:spcAft>
-                <a:spcPts val="600"/>
-              </a:spcAft>
-            </a:pPr>
-            <a:r>
-              <a:rPr sz="1500">
-                <a:solidFill>
-                  <a:srgbClr val="22282E"/>
-                </a:solidFill>
-              </a:rPr>
-              <a:t>•  ❓ ¿La automatización reemplaza al analista?</a:t>
+              <a:t>•  Compara un scan pasivo vs. uno con módulos activos y explica las diferencias de huella.</a:t>
+            </a:r>
+          </a:p>
+          <a:p>
+            <a:pPr>
+              <a:spcAft>
+                <a:spcPts val="600"/>
+              </a:spcAft>
+            </a:pPr>
+            <a:r>
+              <a:rPr sz="1500">
+                <a:solidFill>
+                  <a:srgbClr val="22282E"/>
+                </a:solidFill>
+              </a:rPr>
+              <a:t>•  Documenta cómo una API key cambia el volumen y calidad de resultados.</a:t>
+            </a:r>
+          </a:p>
+          <a:p>
+            <a:pPr>
+              <a:spcAft>
+                <a:spcPts val="600"/>
+              </a:spcAft>
+            </a:pPr>
+            <a:r>
+              <a:rPr sz="1500">
+                <a:solidFill>
+                  <a:srgbClr val="22282E"/>
+                </a:solidFill>
+              </a:rPr>
+              <a:t>•  Construye un grafo Maltego de al menos 15 entidades a partir de un dominio.</a:t>
+            </a:r>
+          </a:p>
+          <a:p>
+            <a:pPr>
+              <a:spcAft>
+                <a:spcPts val="600"/>
+              </a:spcAft>
+            </a:pPr>
+            <a:r>
+              <a:rPr sz="1500">
+                <a:solidFill>
+                  <a:srgbClr val="22282E"/>
+                </a:solidFill>
+              </a:rPr>
+              <a:t>•  Identifica 3 correlaciones útiles de SpiderFoot y verifícalas a mano.</a:t>
+            </a:r>
+          </a:p>
+          <a:p>
+            <a:pPr>
+              <a:spcAft>
+                <a:spcPts val="600"/>
+              </a:spcAft>
+            </a:pPr>
+            <a:r>
+              <a:rPr sz="1500">
+                <a:solidFill>
+                  <a:srgbClr val="22282E"/>
+                </a:solidFill>
+              </a:rPr>
+              <a:t>•  Explica un caso en que la automatización generó un falso positivo y cómo lo detectaste.</a:t>
+            </a:r>
+          </a:p>
+          <a:p>
+            <a:pPr>
+              <a:spcAft>
+                <a:spcPts val="600"/>
+              </a:spcAft>
+            </a:pPr>
+            <a:r>
+              <a:rPr sz="1500">
+                <a:solidFill>
+                  <a:srgbClr val="22282E"/>
+                </a:solidFill>
+              </a:rPr>
+              <a:t>•  Diseña un flujo que combine SpiderFoot (recolección) y Maltego (visualización).</a:t>
             </a:r>
           </a:p>
         </p:txBody>
@@ -3676,7 +3695,7 @@
                   <a:srgbClr val="0B3D2E"/>
                 </a:solidFill>
               </a:rPr>
-              <a:t>🔗 Referencias</a:t>
+              <a:t>📝 Reto verificable</a:t>
             </a:r>
           </a:p>
         </p:txBody>
@@ -3714,6 +3733,483 @@
                   <a:srgbClr val="22282E"/>
                 </a:solidFill>
               </a:rPr>
+              <a:t>•  Entrega un informe OSINT automatizado de un objetivo autorizado que incluya: configuración del</a:t>
+            </a:r>
+          </a:p>
+          <a:p>
+            <a:pPr>
+              <a:spcAft>
+                <a:spcPts val="600"/>
+              </a:spcAft>
+            </a:pPr>
+            <a:r>
+              <a:rPr sz="1500">
+                <a:solidFill>
+                  <a:srgbClr val="22282E"/>
+                </a:solidFill>
+              </a:rPr>
+              <a:t>•  scan (modo y módulos), grafo de relaciones exportado y una tabla de hallazgos verificados</a:t>
+            </a:r>
+          </a:p>
+          <a:p>
+            <a:pPr>
+              <a:spcAft>
+                <a:spcPts val="600"/>
+              </a:spcAft>
+            </a:pPr>
+            <a:r>
+              <a:rPr sz="1500">
+                <a:solidFill>
+                  <a:srgbClr val="22282E"/>
+                </a:solidFill>
+              </a:rPr>
+              <a:t>•  manualmente con nivel de confianza.</a:t>
+            </a:r>
+          </a:p>
+          <a:p>
+            <a:pPr>
+              <a:spcAft>
+                <a:spcPts val="600"/>
+              </a:spcAft>
+            </a:pPr>
+            <a:r>
+              <a:rPr sz="1500">
+                <a:solidFill>
+                  <a:srgbClr val="22282E"/>
+                </a:solidFill>
+              </a:rPr>
+              <a:t>•  Criterio de aceptación: el informe demuestra que el escaneo respetó el alcance (pasivo si así se</a:t>
+            </a:r>
+          </a:p>
+          <a:p>
+            <a:pPr>
+              <a:spcAft>
+                <a:spcPts val="600"/>
+              </a:spcAft>
+            </a:pPr>
+            <a:r>
+              <a:rPr sz="1500">
+                <a:solidFill>
+                  <a:srgbClr val="22282E"/>
+                </a:solidFill>
+              </a:rPr>
+              <a:t>•  definió) y cada hallazgo relevante fue verificado fuera de la herramienta.</a:t>
+            </a:r>
+          </a:p>
+        </p:txBody>
+      </p:sp>
+    </p:spTree>
+  </p:cSld>
+  <p:clrMapOvr>
+    <a:masterClrMapping/>
+  </p:clrMapOvr>
+</p:sld>
+</file>
+
+<file path=ppt/slides/slide14.xml><?xml version="1.0" encoding="utf-8"?>
+<p:sld xmlns:a="http://schemas.openxmlformats.org/drawingml/2006/main" xmlns:p="http://schemas.openxmlformats.org/presentationml/2006/main" xmlns:r="http://schemas.openxmlformats.org/officeDocument/2006/relationships">
+  <p:cSld>
+    <p:spTree>
+      <p:nvGrpSpPr>
+        <p:cNvPr id="1" name=""/>
+        <p:cNvGrpSpPr/>
+        <p:nvPr/>
+      </p:nvGrpSpPr>
+      <p:grpSpPr/>
+      <p:sp>
+        <p:nvSpPr>
+          <p:cNvPr id="2" name="TextBox 1"/>
+          <p:cNvSpPr txBox="1"/>
+          <p:nvPr/>
+        </p:nvSpPr>
+        <p:spPr>
+          <a:xfrm>
+            <a:off x="457200" y="320040"/>
+            <a:ext cx="8229600" cy="822960"/>
+          </a:xfrm>
+          <a:prstGeom prst="rect">
+            <a:avLst/>
+          </a:prstGeom>
+          <a:noFill/>
+        </p:spPr>
+        <p:txBody>
+          <a:bodyPr wrap="square">
+            <a:spAutoFit/>
+          </a:bodyPr>
+          <a:lstStyle/>
+          <a:p>
+            <a:r>
+              <a:rPr sz="2600" b="1">
+                <a:solidFill>
+                  <a:srgbClr val="0B3D2E"/>
+                </a:solidFill>
+              </a:rPr>
+              <a:t>⚠️ Errores comunes</a:t>
+            </a:r>
+          </a:p>
+        </p:txBody>
+      </p:sp>
+      <p:sp>
+        <p:nvSpPr>
+          <p:cNvPr id="3" name="TextBox 2"/>
+          <p:cNvSpPr txBox="1"/>
+          <p:nvPr/>
+        </p:nvSpPr>
+        <p:spPr>
+          <a:xfrm>
+            <a:off x="457200" y="1280160"/>
+            <a:ext cx="8229600" cy="4937760"/>
+          </a:xfrm>
+          <a:prstGeom prst="rect">
+            <a:avLst/>
+          </a:prstGeom>
+          <a:noFill/>
+        </p:spPr>
+        <p:txBody>
+          <a:bodyPr wrap="square">
+            <a:spAutoFit/>
+          </a:bodyPr>
+          <a:lstStyle/>
+          <a:p>
+            <a:pPr>
+              <a:spcAft>
+                <a:spcPts val="600"/>
+              </a:spcAft>
+            </a:pPr>
+            <a:r>
+              <a:rPr sz="1500">
+                <a:solidFill>
+                  <a:srgbClr val="22282E"/>
+                </a:solidFill>
+              </a:rPr>
+              <a:t>•  Escaneo genera mucho tráfico al objetivo — Se activaron módulos activos. Cambia a modo pasivo o limita módulos.</a:t>
+            </a:r>
+          </a:p>
+          <a:p>
+            <a:pPr>
+              <a:spcAft>
+                <a:spcPts val="600"/>
+              </a:spcAft>
+            </a:pPr>
+            <a:r>
+              <a:rPr sz="1500">
+                <a:solidFill>
+                  <a:srgbClr val="22282E"/>
+                </a:solidFill>
+              </a:rPr>
+              <a:t>•  Pocos resultados — Faltan API keys. Configúralas en Settings.</a:t>
+            </a:r>
+          </a:p>
+          <a:p>
+            <a:pPr>
+              <a:spcAft>
+                <a:spcPts val="600"/>
+              </a:spcAft>
+            </a:pPr>
+            <a:r>
+              <a:rPr sz="1500">
+                <a:solidFill>
+                  <a:srgbClr val="22282E"/>
+                </a:solidFill>
+              </a:rPr>
+              <a:t>•  Grafo Maltego saturado e ilegible — Demasiadas entidades. Filtra, agrupa y usa layouts.</a:t>
+            </a:r>
+          </a:p>
+          <a:p>
+            <a:pPr>
+              <a:spcAft>
+                <a:spcPts val="600"/>
+              </a:spcAft>
+            </a:pPr>
+            <a:r>
+              <a:rPr sz="1500">
+                <a:solidFill>
+                  <a:srgbClr val="22282E"/>
+                </a:solidFill>
+              </a:rPr>
+              <a:t>•  Transforms fallan — Cuota agotada o transform hub no instalado. Revisa límites y reintenta.</a:t>
+            </a:r>
+          </a:p>
+          <a:p>
+            <a:pPr>
+              <a:spcAft>
+                <a:spcPts val="600"/>
+              </a:spcAft>
+            </a:pPr>
+            <a:r>
+              <a:rPr sz="1500">
+                <a:solidFill>
+                  <a:srgbClr val="22282E"/>
+                </a:solidFill>
+              </a:rPr>
+              <a:t>•  Resultados contradictorios — Fuentes desactualizadas. Verifica manualmente antes de concluir.</a:t>
+            </a:r>
+          </a:p>
+        </p:txBody>
+      </p:sp>
+    </p:spTree>
+  </p:cSld>
+  <p:clrMapOvr>
+    <a:masterClrMapping/>
+  </p:clrMapOvr>
+</p:sld>
+</file>
+
+<file path=ppt/slides/slide15.xml><?xml version="1.0" encoding="utf-8"?>
+<p:sld xmlns:a="http://schemas.openxmlformats.org/drawingml/2006/main" xmlns:p="http://schemas.openxmlformats.org/presentationml/2006/main" xmlns:r="http://schemas.openxmlformats.org/officeDocument/2006/relationships">
+  <p:cSld>
+    <p:spTree>
+      <p:nvGrpSpPr>
+        <p:cNvPr id="1" name=""/>
+        <p:cNvGrpSpPr/>
+        <p:nvPr/>
+      </p:nvGrpSpPr>
+      <p:grpSpPr/>
+      <p:sp>
+        <p:nvSpPr>
+          <p:cNvPr id="2" name="TextBox 1"/>
+          <p:cNvSpPr txBox="1"/>
+          <p:nvPr/>
+        </p:nvSpPr>
+        <p:spPr>
+          <a:xfrm>
+            <a:off x="457200" y="320040"/>
+            <a:ext cx="8229600" cy="822960"/>
+          </a:xfrm>
+          <a:prstGeom prst="rect">
+            <a:avLst/>
+          </a:prstGeom>
+          <a:noFill/>
+        </p:spPr>
+        <p:txBody>
+          <a:bodyPr wrap="square">
+            <a:spAutoFit/>
+          </a:bodyPr>
+          <a:lstStyle/>
+          <a:p>
+            <a:r>
+              <a:rPr sz="2600" b="1">
+                <a:solidFill>
+                  <a:srgbClr val="0B3D2E"/>
+                </a:solidFill>
+              </a:rPr>
+              <a:t>❓ Preguntas frecuentes</a:t>
+            </a:r>
+          </a:p>
+        </p:txBody>
+      </p:sp>
+      <p:sp>
+        <p:nvSpPr>
+          <p:cNvPr id="3" name="TextBox 2"/>
+          <p:cNvSpPr txBox="1"/>
+          <p:nvPr/>
+        </p:nvSpPr>
+        <p:spPr>
+          <a:xfrm>
+            <a:off x="457200" y="1280160"/>
+            <a:ext cx="8229600" cy="4937760"/>
+          </a:xfrm>
+          <a:prstGeom prst="rect">
+            <a:avLst/>
+          </a:prstGeom>
+          <a:noFill/>
+        </p:spPr>
+        <p:txBody>
+          <a:bodyPr wrap="square">
+            <a:spAutoFit/>
+          </a:bodyPr>
+          <a:lstStyle/>
+          <a:p>
+            <a:pPr>
+              <a:spcAft>
+                <a:spcPts val="600"/>
+              </a:spcAft>
+            </a:pPr>
+            <a:r>
+              <a:rPr sz="1500">
+                <a:solidFill>
+                  <a:srgbClr val="22282E"/>
+                </a:solidFill>
+              </a:rPr>
+              <a:t>•  ❓ ¿SpiderFoot es siempre pasivo?</a:t>
+            </a:r>
+          </a:p>
+          <a:p>
+            <a:pPr>
+              <a:spcAft>
+                <a:spcPts val="600"/>
+              </a:spcAft>
+            </a:pPr>
+            <a:r>
+              <a:rPr sz="1500">
+                <a:solidFill>
+                  <a:srgbClr val="22282E"/>
+                </a:solidFill>
+              </a:rPr>
+              <a:t>•  No. Tiene módulos activos que consultan al objetivo (DNS, HTTP). Usa el modo pasivo si tu alcance lo</a:t>
+            </a:r>
+          </a:p>
+          <a:p>
+            <a:pPr>
+              <a:spcAft>
+                <a:spcPts val="600"/>
+              </a:spcAft>
+            </a:pPr>
+            <a:r>
+              <a:rPr sz="1500">
+                <a:solidFill>
+                  <a:srgbClr val="22282E"/>
+                </a:solidFill>
+              </a:rPr>
+              <a:t>•  exige.</a:t>
+            </a:r>
+          </a:p>
+          <a:p>
+            <a:pPr>
+              <a:spcAft>
+                <a:spcPts val="600"/>
+              </a:spcAft>
+            </a:pPr>
+            <a:r>
+              <a:rPr sz="1500">
+                <a:solidFill>
+                  <a:srgbClr val="22282E"/>
+                </a:solidFill>
+              </a:rPr>
+              <a:t>•  ❓ ¿Maltego CE sirve profesionalmente?</a:t>
+            </a:r>
+          </a:p>
+          <a:p>
+            <a:pPr>
+              <a:spcAft>
+                <a:spcPts val="600"/>
+              </a:spcAft>
+            </a:pPr>
+            <a:r>
+              <a:rPr sz="1500">
+                <a:solidFill>
+                  <a:srgbClr val="22282E"/>
+                </a:solidFill>
+              </a:rPr>
+              <a:t>•  Para aprender y grafos pequeños sí. Tiene límites de entidades por transform; la edición comercial</a:t>
+            </a:r>
+          </a:p>
+          <a:p>
+            <a:pPr>
+              <a:spcAft>
+                <a:spcPts val="600"/>
+              </a:spcAft>
+            </a:pPr>
+            <a:r>
+              <a:rPr sz="1500">
+                <a:solidFill>
+                  <a:srgbClr val="22282E"/>
+                </a:solidFill>
+              </a:rPr>
+              <a:t>•  levanta esos límites.</a:t>
+            </a:r>
+          </a:p>
+          <a:p>
+            <a:pPr>
+              <a:spcAft>
+                <a:spcPts val="600"/>
+              </a:spcAft>
+            </a:pPr>
+            <a:r>
+              <a:rPr sz="1500">
+                <a:solidFill>
+                  <a:srgbClr val="22282E"/>
+                </a:solidFill>
+              </a:rPr>
+              <a:t>•  ❓ ¿La automatización reemplaza al analista?</a:t>
+            </a:r>
+          </a:p>
+        </p:txBody>
+      </p:sp>
+    </p:spTree>
+  </p:cSld>
+  <p:clrMapOvr>
+    <a:masterClrMapping/>
+  </p:clrMapOvr>
+</p:sld>
+</file>
+
+<file path=ppt/slides/slide16.xml><?xml version="1.0" encoding="utf-8"?>
+<p:sld xmlns:a="http://schemas.openxmlformats.org/drawingml/2006/main" xmlns:p="http://schemas.openxmlformats.org/presentationml/2006/main" xmlns:r="http://schemas.openxmlformats.org/officeDocument/2006/relationships">
+  <p:cSld>
+    <p:spTree>
+      <p:nvGrpSpPr>
+        <p:cNvPr id="1" name=""/>
+        <p:cNvGrpSpPr/>
+        <p:nvPr/>
+      </p:nvGrpSpPr>
+      <p:grpSpPr/>
+      <p:sp>
+        <p:nvSpPr>
+          <p:cNvPr id="2" name="TextBox 1"/>
+          <p:cNvSpPr txBox="1"/>
+          <p:nvPr/>
+        </p:nvSpPr>
+        <p:spPr>
+          <a:xfrm>
+            <a:off x="457200" y="320040"/>
+            <a:ext cx="8229600" cy="822960"/>
+          </a:xfrm>
+          <a:prstGeom prst="rect">
+            <a:avLst/>
+          </a:prstGeom>
+          <a:noFill/>
+        </p:spPr>
+        <p:txBody>
+          <a:bodyPr wrap="square">
+            <a:spAutoFit/>
+          </a:bodyPr>
+          <a:lstStyle/>
+          <a:p>
+            <a:r>
+              <a:rPr sz="2600" b="1">
+                <a:solidFill>
+                  <a:srgbClr val="0B3D2E"/>
+                </a:solidFill>
+              </a:rPr>
+              <a:t>🔗 Referencias</a:t>
+            </a:r>
+          </a:p>
+        </p:txBody>
+      </p:sp>
+      <p:sp>
+        <p:nvSpPr>
+          <p:cNvPr id="3" name="TextBox 2"/>
+          <p:cNvSpPr txBox="1"/>
+          <p:nvPr/>
+        </p:nvSpPr>
+        <p:spPr>
+          <a:xfrm>
+            <a:off x="457200" y="1280160"/>
+            <a:ext cx="8229600" cy="4937760"/>
+          </a:xfrm>
+          <a:prstGeom prst="rect">
+            <a:avLst/>
+          </a:prstGeom>
+          <a:noFill/>
+        </p:spPr>
+        <p:txBody>
+          <a:bodyPr wrap="square">
+            <a:spAutoFit/>
+          </a:bodyPr>
+          <a:lstStyle/>
+          <a:p>
+            <a:pPr>
+              <a:spcAft>
+                <a:spcPts val="600"/>
+              </a:spcAft>
+            </a:pPr>
+            <a:r>
+              <a:rPr sz="1500">
+                <a:solidFill>
+                  <a:srgbClr val="22282E"/>
+                </a:solidFill>
+              </a:rPr>
               <a:t>•  SpiderFoot — Docs. &lt;https://github.com/smicallef/spiderfoot&gt;</a:t>
             </a:r>
           </a:p>
@@ -3764,6 +4260,81 @@
           </a:p>
         </p:txBody>
       </p:sp>
+    </p:spTree>
+  </p:cSld>
+  <p:clrMapOvr>
+    <a:masterClrMapping/>
+  </p:clrMapOvr>
+</p:sld>
+</file>
+
+<file path=ppt/slides/slide17.xml><?xml version="1.0" encoding="utf-8"?>
+<p:sld xmlns:a="http://schemas.openxmlformats.org/drawingml/2006/main" xmlns:p="http://schemas.openxmlformats.org/presentationml/2006/main" xmlns:r="http://schemas.openxmlformats.org/officeDocument/2006/relationships">
+  <p:cSld>
+    <p:spTree>
+      <p:nvGrpSpPr>
+        <p:cNvPr id="1" name=""/>
+        <p:cNvGrpSpPr/>
+        <p:nvPr/>
+      </p:nvGrpSpPr>
+      <p:grpSpPr/>
+      <p:sp>
+        <p:nvSpPr>
+          <p:cNvPr id="2" name="TextBox 1"/>
+          <p:cNvSpPr txBox="1"/>
+          <p:nvPr/>
+        </p:nvSpPr>
+        <p:spPr>
+          <a:xfrm>
+            <a:off x="457200" y="274320"/>
+            <a:ext cx="8229600" cy="640080"/>
+          </a:xfrm>
+          <a:prstGeom prst="rect">
+            <a:avLst/>
+          </a:prstGeom>
+          <a:noFill/>
+        </p:spPr>
+        <p:txBody>
+          <a:bodyPr wrap="square">
+            <a:spAutoFit/>
+          </a:bodyPr>
+          <a:lstStyle/>
+          <a:p>
+            <a:r>
+              <a:rPr sz="2200" b="1">
+                <a:solidFill>
+                  <a:srgbClr val="0B3D2E"/>
+                </a:solidFill>
+              </a:rPr>
+              <a:t>Diagrama de la clase</a:t>
+            </a:r>
+          </a:p>
+        </p:txBody>
+      </p:sp>
+      <p:pic>
+        <p:nvPicPr>
+          <p:cNvPr id="3" name="Picture 2" descr="013feebff3a730c5.png"/>
+          <p:cNvPicPr>
+            <a:picLocks noChangeAspect="1"/>
+          </p:cNvPicPr>
+          <p:nvPr/>
+        </p:nvPicPr>
+        <p:blipFill>
+          <a:blip r:embed="rId2"/>
+          <a:stretch>
+            <a:fillRect/>
+          </a:stretch>
+        </p:blipFill>
+        <p:spPr>
+          <a:xfrm>
+            <a:off x="457200" y="3351276"/>
+            <a:ext cx="8229600" cy="795528"/>
+          </a:xfrm>
+          <a:prstGeom prst="rect">
+            <a:avLst/>
+          </a:prstGeom>
+        </p:spPr>
+      </p:pic>
     </p:spTree>
   </p:cSld>
   <p:clrMapOvr>
@@ -4406,7 +4977,7 @@
                   <a:srgbClr val="0B3D2E"/>
                 </a:solidFill>
               </a:rPr>
-              <a:t>📖 Definiciones y características</a:t>
+              <a:t>🧠 Explicación en profundidad</a:t>
             </a:r>
           </a:p>
         </p:txBody>
@@ -4444,82 +5015,82 @@
                   <a:srgbClr val="22282E"/>
                 </a:solidFill>
               </a:rPr>
-              <a:t>•  SpiderFoot: framework de recolección OSINT por módulos. Característica: automatiza cientos de fuentes y correlaciona.</a:t>
-            </a:r>
-          </a:p>
-          <a:p>
-            <a:pPr>
-              <a:spcAft>
-                <a:spcPts val="600"/>
-              </a:spcAft>
-            </a:pPr>
-            <a:r>
-              <a:rPr sz="1500">
-                <a:solidFill>
-                  <a:srgbClr val="22282E"/>
-                </a:solidFill>
-              </a:rPr>
-              <a:t>•  Módulo: plugin que consulta una fuente concreta. Característica: unos son pasivos, otros hacen peticiones activas.</a:t>
-            </a:r>
-          </a:p>
-          <a:p>
-            <a:pPr>
-              <a:spcAft>
-                <a:spcPts val="600"/>
-              </a:spcAft>
-            </a:pPr>
-            <a:r>
-              <a:rPr sz="1500">
-                <a:solidFill>
-                  <a:srgbClr val="22282E"/>
-                </a:solidFill>
-              </a:rPr>
-              <a:t>•  Maltego: herramienta de link analysis basada en entidades y transforms. Característica: convierte datos en grafos navegables.</a:t>
-            </a:r>
-          </a:p>
-          <a:p>
-            <a:pPr>
-              <a:spcAft>
-                <a:spcPts val="600"/>
-              </a:spcAft>
-            </a:pPr>
-            <a:r>
-              <a:rPr sz="1500">
-                <a:solidFill>
-                  <a:srgbClr val="22282E"/>
-                </a:solidFill>
-              </a:rPr>
-              <a:t>•  Transform: operación que, dada una entidad, devuelve entidades relacionadas. Característica: el motor del pivoteo en Maltego.</a:t>
-            </a:r>
-          </a:p>
-          <a:p>
-            <a:pPr>
-              <a:spcAft>
-                <a:spcPts val="600"/>
-              </a:spcAft>
-            </a:pPr>
-            <a:r>
-              <a:rPr sz="1500">
-                <a:solidFill>
-                  <a:srgbClr val="22282E"/>
-                </a:solidFill>
-              </a:rPr>
-              <a:t>•  Entidad: nodo del grafo (dominio, correo, persona, IP). Característica: unidad básica del análisis.</a:t>
-            </a:r>
-          </a:p>
-          <a:p>
-            <a:pPr>
-              <a:spcAft>
-                <a:spcPts val="600"/>
-              </a:spcAft>
-            </a:pPr>
-            <a:r>
-              <a:rPr sz="1500">
-                <a:solidFill>
-                  <a:srgbClr val="22282E"/>
-                </a:solidFill>
-              </a:rPr>
-              <a:t>•  Correlación: regla que agrupa hallazgos relevantes. Característica: reduce ruido y prioriza.</a:t>
+              <a:t>•  SpiderFoot y Maltego convierten semillas en consultas y relaciones. Son útiles para repetir tareas, conservar caminos y encontrar candidatos, pero no validan automáticamente identidad, propiedad ni…</a:t>
+            </a:r>
+          </a:p>
+          <a:p>
+            <a:pPr>
+              <a:spcAft>
+                <a:spcPts val="600"/>
+              </a:spcAft>
+            </a:pPr>
+            <a:r>
+              <a:rPr sz="1500">
+                <a:solidFill>
+                  <a:srgbClr val="22282E"/>
+                </a:solidFill>
+              </a:rPr>
+              <a:t>•  El diagrama coloca la revisión después del grafo, no porque solo se revise al final, sino para recordar que una arista generada es una afirmación que necesita procedencia. Cada nodo debería conservar…</a:t>
+            </a:r>
+          </a:p>
+          <a:p>
+            <a:pPr>
+              <a:spcAft>
+                <a:spcPts val="600"/>
+              </a:spcAft>
+            </a:pPr>
+            <a:r>
+              <a:rPr sz="1500">
+                <a:solidFill>
+                  <a:srgbClr val="22282E"/>
+                </a:solidFill>
+              </a:rPr>
+              <a:t>•  Se parte de una pregunta y módulos necesarios, no de «ejecutar todo». Los módulos pueden consultar servicios externos, consumir cuotas, transmitir la semilla o realizar actividad directa; se revisan…</a:t>
+            </a:r>
+          </a:p>
+          <a:p>
+            <a:pPr>
+              <a:spcAft>
+                <a:spcPts val="600"/>
+              </a:spcAft>
+            </a:pPr>
+            <a:r>
+              <a:rPr sz="1500">
+                <a:solidFill>
+                  <a:srgbClr val="22282E"/>
+                </a:solidFill>
+              </a:rPr>
+              <a:t>•  Una ejecución reproducible conserva versión de herramienta, configuración, semillas, fecha y exportación original. Los resultados cambian porque Internet cambia; repetir no significa obtener lo…</a:t>
+            </a:r>
+          </a:p>
+          <a:p>
+            <a:pPr>
+              <a:spcAft>
+                <a:spcPts val="600"/>
+              </a:spcAft>
+            </a:pPr>
+            <a:r>
+              <a:rPr sz="1500">
+                <a:solidFill>
+                  <a:srgbClr val="22282E"/>
+                </a:solidFill>
+              </a:rPr>
+              <a:t>•  El color y el tamaño de un nodo pueden representar confianza, tipo o centralidad, pero la leyenda debe decirlo. Un nodo central en la muestra puede ser un CDN o servicio compartido. Los caminos…</a:t>
+            </a:r>
+          </a:p>
+          <a:p>
+            <a:pPr>
+              <a:spcAft>
+                <a:spcPts val="600"/>
+              </a:spcAft>
+            </a:pPr>
+            <a:r>
+              <a:rPr sz="1500">
+                <a:solidFill>
+                  <a:srgbClr val="22282E"/>
+                </a:solidFill>
+              </a:rPr>
+              <a:t>•  Un transform relaciona dos organizaciones mediante la misma IP. La visualización sugiere infraestructura común, pero la IP pertenece a un hosting masivo. El analista cambia la relación a «alojado…</a:t>
             </a:r>
           </a:p>
         </p:txBody>
@@ -4570,7 +5141,7 @@
                   <a:srgbClr val="0B3D2E"/>
                 </a:solidFill>
               </a:rPr>
-              <a:t>🧰 Herramientas y preparación</a:t>
+              <a:t>📔 Glosario operativo</a:t>
             </a:r>
           </a:p>
         </p:txBody>
@@ -4608,67 +5179,82 @@
                   <a:srgbClr val="22282E"/>
                 </a:solidFill>
               </a:rPr>
-              <a:t>•  SpiderFoot: pip install spiderfoot o vía Docker; arranca la UI con python3 sf.py -l 127.0.0.1:5001.</a:t>
-            </a:r>
-          </a:p>
-          <a:p>
-            <a:pPr>
-              <a:spcAft>
-                <a:spcPts val="600"/>
-              </a:spcAft>
-            </a:pPr>
-            <a:r>
-              <a:rPr sz="1500">
-                <a:solidFill>
-                  <a:srgbClr val="22282E"/>
-                </a:solidFill>
-              </a:rPr>
-              <a:t>•  API keys: registra claves gratuitas (Shodan, HIBP, VirusTotal, etc.) en Settings para enriquecer.</a:t>
-            </a:r>
-          </a:p>
-          <a:p>
-            <a:pPr>
-              <a:spcAft>
-                <a:spcPts val="600"/>
-              </a:spcAft>
-            </a:pPr>
-            <a:r>
-              <a:rPr sz="1500">
-                <a:solidFill>
-                  <a:srgbClr val="22282E"/>
-                </a:solidFill>
-              </a:rPr>
-              <a:t>•  Maltego: edición Community (CE) gratuita; registra una cuenta y añade transform hubs.</a:t>
-            </a:r>
-          </a:p>
-          <a:p>
-            <a:pPr>
-              <a:spcAft>
-                <a:spcPts val="600"/>
-              </a:spcAft>
-            </a:pPr>
-            <a:r>
-              <a:rPr sz="1500">
-                <a:solidFill>
-                  <a:srgbClr val="22282E"/>
-                </a:solidFill>
-              </a:rPr>
-              <a:t>•  Entorno aislado y sock puppets ya listos; documenta el alcance antes de escanear.</a:t>
-            </a:r>
-          </a:p>
-          <a:p>
-            <a:pPr>
-              <a:spcAft>
-                <a:spcPts val="600"/>
-              </a:spcAft>
-            </a:pPr>
-            <a:r>
-              <a:rPr sz="1500">
-                <a:solidFill>
-                  <a:srgbClr val="22282E"/>
-                </a:solidFill>
-              </a:rPr>
-              <a:t>•  Recordatorio: define el objetivo autorizado y desactiva módulos activos si el alcance es solo pasivo.</a:t>
+              <a:t>•  Término — Definición útil</a:t>
+            </a:r>
+          </a:p>
+          <a:p>
+            <a:pPr>
+              <a:spcAft>
+                <a:spcPts val="600"/>
+              </a:spcAft>
+            </a:pPr>
+            <a:r>
+              <a:rPr sz="1500">
+                <a:solidFill>
+                  <a:srgbClr val="22282E"/>
+                </a:solidFill>
+              </a:rPr>
+              <a:t>•  Semilla — Entidad inicial autorizada desde la que comienza la expansión.</a:t>
+            </a:r>
+          </a:p>
+          <a:p>
+            <a:pPr>
+              <a:spcAft>
+                <a:spcPts val="600"/>
+              </a:spcAft>
+            </a:pPr>
+            <a:r>
+              <a:rPr sz="1500">
+                <a:solidFill>
+                  <a:srgbClr val="22282E"/>
+                </a:solidFill>
+              </a:rPr>
+              <a:t>•  Transform/módulo — Operación que consulta o deriva relaciones.</a:t>
+            </a:r>
+          </a:p>
+          <a:p>
+            <a:pPr>
+              <a:spcAft>
+                <a:spcPts val="600"/>
+              </a:spcAft>
+            </a:pPr>
+            <a:r>
+              <a:rPr sz="1500">
+                <a:solidFill>
+                  <a:srgbClr val="22282E"/>
+                </a:solidFill>
+              </a:rPr>
+              <a:t>•  Normalización — Conversión a formas comparables sin asumir identidad.</a:t>
+            </a:r>
+          </a:p>
+          <a:p>
+            <a:pPr>
+              <a:spcAft>
+                <a:spcPts val="600"/>
+              </a:spcAft>
+            </a:pPr>
+            <a:r>
+              <a:rPr sz="1500">
+                <a:solidFill>
+                  <a:srgbClr val="22282E"/>
+                </a:solidFill>
+              </a:rPr>
+              <a:t>•  Arista — Relación tipada entre nodos, con fuente y tiempo.</a:t>
+            </a:r>
+          </a:p>
+          <a:p>
+            <a:pPr>
+              <a:spcAft>
+                <a:spcPts val="600"/>
+              </a:spcAft>
+            </a:pPr>
+            <a:r>
+              <a:rPr sz="1500">
+                <a:solidFill>
+                  <a:srgbClr val="22282E"/>
+                </a:solidFill>
+              </a:rPr>
+              <a:t>•  Propagación de error — Ampliación de una asociación incorrecta a resultados posteriores.</a:t>
             </a:r>
           </a:p>
         </p:txBody>
@@ -4719,7 +5305,7 @@
                   <a:srgbClr val="0B3D2E"/>
                 </a:solidFill>
               </a:rPr>
-              <a:t>🧪 Laboratorio guiado</a:t>
+              <a:t>✅ Criterio de dominio</a:t>
             </a:r>
           </a:p>
         </p:txBody>
@@ -4757,97 +5343,7 @@
                   <a:srgbClr val="22282E"/>
                 </a:solidFill>
               </a:rPr>
-              <a:t>•  Objetivo: un dominio propio o example.com.</a:t>
-            </a:r>
-          </a:p>
-          <a:p>
-            <a:pPr>
-              <a:spcAft>
-                <a:spcPts val="600"/>
-              </a:spcAft>
-            </a:pPr>
-            <a:r>
-              <a:rPr sz="1500">
-                <a:solidFill>
-                  <a:srgbClr val="22282E"/>
-                </a:solidFill>
-              </a:rPr>
-              <a:t>•  Arranca SpiderFoot y crea un scan nuevo con el dominio como objetivo.</a:t>
-            </a:r>
-          </a:p>
-          <a:p>
-            <a:pPr>
-              <a:spcAft>
-                <a:spcPts val="600"/>
-              </a:spcAft>
-            </a:pPr>
-            <a:r>
-              <a:rPr sz="1500">
-                <a:solidFill>
-                  <a:srgbClr val="22282E"/>
-                </a:solidFill>
-              </a:rPr>
-              <a:t>•  Selecciona el modo "Passive" para no tocar al objetivo; revisa qué módulos se activan.</a:t>
-            </a:r>
-          </a:p>
-          <a:p>
-            <a:pPr>
-              <a:spcAft>
-                <a:spcPts val="600"/>
-              </a:spcAft>
-            </a:pPr>
-            <a:r>
-              <a:rPr sz="1500">
-                <a:solidFill>
-                  <a:srgbClr val="22282E"/>
-                </a:solidFill>
-              </a:rPr>
-              <a:t>•  Añade una API key (p. ej. Shodan) en Settings y repite un scan para comparar la cobertura.</a:t>
-            </a:r>
-          </a:p>
-          <a:p>
-            <a:pPr>
-              <a:spcAft>
-                <a:spcPts val="600"/>
-              </a:spcAft>
-            </a:pPr>
-            <a:r>
-              <a:rPr sz="1500">
-                <a:solidFill>
-                  <a:srgbClr val="22282E"/>
-                </a:solidFill>
-              </a:rPr>
-              <a:t>•  Explora los resultados por tipo de dato (correos, subdominios, IPs) y abre la vista de correlaciones.</a:t>
-            </a:r>
-          </a:p>
-          <a:p>
-            <a:pPr>
-              <a:spcAft>
-                <a:spcPts val="600"/>
-              </a:spcAft>
-            </a:pPr>
-            <a:r>
-              <a:rPr sz="1500">
-                <a:solidFill>
-                  <a:srgbClr val="22282E"/>
-                </a:solidFill>
-              </a:rPr>
-              <a:t>•  Exporta los hallazgos a CSV/GEXF para análisis externo.</a:t>
-            </a:r>
-          </a:p>
-          <a:p>
-            <a:pPr>
-              <a:spcAft>
-                <a:spcPts val="600"/>
-              </a:spcAft>
-            </a:pPr>
-            <a:r>
-              <a:rPr sz="1500">
-                <a:solidFill>
-                  <a:srgbClr val="22282E"/>
-                </a:solidFill>
-              </a:rPr>
-              <a:t>•  En Maltego CE, crea un grafo, arrastra una entidad Domain con tu dominio.</a:t>
+              <a:t>•  El alumno domina la automatización cuando selecciona módulos por pregunta y riesgo, conserva configuración y procedencia, revisa relaciones críticas y entrega un grafo cuya leyenda, fuentes y límites…</a:t>
             </a:r>
           </a:p>
         </p:txBody>
@@ -4898,7 +5394,7 @@
                   <a:srgbClr val="0B3D2E"/>
                 </a:solidFill>
               </a:rPr>
-              <a:t>✍️ Ejercicios</a:t>
+              <a:t>📖 Definiciones y características</a:t>
             </a:r>
           </a:p>
         </p:txBody>
@@ -4936,82 +5432,82 @@
                   <a:srgbClr val="22282E"/>
                 </a:solidFill>
               </a:rPr>
-              <a:t>•  Compara un scan pasivo vs. uno con módulos activos y explica las diferencias de huella.</a:t>
-            </a:r>
-          </a:p>
-          <a:p>
-            <a:pPr>
-              <a:spcAft>
-                <a:spcPts val="600"/>
-              </a:spcAft>
-            </a:pPr>
-            <a:r>
-              <a:rPr sz="1500">
-                <a:solidFill>
-                  <a:srgbClr val="22282E"/>
-                </a:solidFill>
-              </a:rPr>
-              <a:t>•  Documenta cómo una API key cambia el volumen y calidad de resultados.</a:t>
-            </a:r>
-          </a:p>
-          <a:p>
-            <a:pPr>
-              <a:spcAft>
-                <a:spcPts val="600"/>
-              </a:spcAft>
-            </a:pPr>
-            <a:r>
-              <a:rPr sz="1500">
-                <a:solidFill>
-                  <a:srgbClr val="22282E"/>
-                </a:solidFill>
-              </a:rPr>
-              <a:t>•  Construye un grafo Maltego de al menos 15 entidades a partir de un dominio.</a:t>
-            </a:r>
-          </a:p>
-          <a:p>
-            <a:pPr>
-              <a:spcAft>
-                <a:spcPts val="600"/>
-              </a:spcAft>
-            </a:pPr>
-            <a:r>
-              <a:rPr sz="1500">
-                <a:solidFill>
-                  <a:srgbClr val="22282E"/>
-                </a:solidFill>
-              </a:rPr>
-              <a:t>•  Identifica 3 correlaciones útiles de SpiderFoot y verifícalas a mano.</a:t>
-            </a:r>
-          </a:p>
-          <a:p>
-            <a:pPr>
-              <a:spcAft>
-                <a:spcPts val="600"/>
-              </a:spcAft>
-            </a:pPr>
-            <a:r>
-              <a:rPr sz="1500">
-                <a:solidFill>
-                  <a:srgbClr val="22282E"/>
-                </a:solidFill>
-              </a:rPr>
-              <a:t>•  Explica un caso en que la automatización generó un falso positivo y cómo lo detectaste.</a:t>
-            </a:r>
-          </a:p>
-          <a:p>
-            <a:pPr>
-              <a:spcAft>
-                <a:spcPts val="600"/>
-              </a:spcAft>
-            </a:pPr>
-            <a:r>
-              <a:rPr sz="1500">
-                <a:solidFill>
-                  <a:srgbClr val="22282E"/>
-                </a:solidFill>
-              </a:rPr>
-              <a:t>•  Diseña un flujo que combine SpiderFoot (recolección) y Maltego (visualización).</a:t>
+              <a:t>•  SpiderFoot: framework de recolección OSINT por módulos. Característica: automatiza cientos de fuentes y correlaciona.</a:t>
+            </a:r>
+          </a:p>
+          <a:p>
+            <a:pPr>
+              <a:spcAft>
+                <a:spcPts val="600"/>
+              </a:spcAft>
+            </a:pPr>
+            <a:r>
+              <a:rPr sz="1500">
+                <a:solidFill>
+                  <a:srgbClr val="22282E"/>
+                </a:solidFill>
+              </a:rPr>
+              <a:t>•  Módulo: plugin que consulta una fuente concreta. Característica: unos son pasivos, otros hacen peticiones activas.</a:t>
+            </a:r>
+          </a:p>
+          <a:p>
+            <a:pPr>
+              <a:spcAft>
+                <a:spcPts val="600"/>
+              </a:spcAft>
+            </a:pPr>
+            <a:r>
+              <a:rPr sz="1500">
+                <a:solidFill>
+                  <a:srgbClr val="22282E"/>
+                </a:solidFill>
+              </a:rPr>
+              <a:t>•  Maltego: herramienta de link analysis basada en entidades y transforms. Característica: convierte datos en grafos navegables.</a:t>
+            </a:r>
+          </a:p>
+          <a:p>
+            <a:pPr>
+              <a:spcAft>
+                <a:spcPts val="600"/>
+              </a:spcAft>
+            </a:pPr>
+            <a:r>
+              <a:rPr sz="1500">
+                <a:solidFill>
+                  <a:srgbClr val="22282E"/>
+                </a:solidFill>
+              </a:rPr>
+              <a:t>•  Transform: operación que, dada una entidad, devuelve entidades relacionadas. Característica: el motor del pivoteo en Maltego.</a:t>
+            </a:r>
+          </a:p>
+          <a:p>
+            <a:pPr>
+              <a:spcAft>
+                <a:spcPts val="600"/>
+              </a:spcAft>
+            </a:pPr>
+            <a:r>
+              <a:rPr sz="1500">
+                <a:solidFill>
+                  <a:srgbClr val="22282E"/>
+                </a:solidFill>
+              </a:rPr>
+              <a:t>•  Entidad: nodo del grafo (dominio, correo, persona, IP). Característica: unidad básica del análisis.</a:t>
+            </a:r>
+          </a:p>
+          <a:p>
+            <a:pPr>
+              <a:spcAft>
+                <a:spcPts val="600"/>
+              </a:spcAft>
+            </a:pPr>
+            <a:r>
+              <a:rPr sz="1500">
+                <a:solidFill>
+                  <a:srgbClr val="22282E"/>
+                </a:solidFill>
+              </a:rPr>
+              <a:t>•  Correlación: regla que agrupa hallazgos relevantes. Característica: reduce ruido y prioriza.</a:t>
             </a:r>
           </a:p>
         </p:txBody>
